--- a/decks/maths-algebra/maths-algebra_ch5_find-two-step.pptx
+++ b/decks/maths-algebra/maths-algebra_ch5_find-two-step.pptx
@@ -123,49 +123,49 @@
   <p:extLst>
     <p:ext uri="{521415D9-36F7-43E2-AB2F-B90AF26B5E84}">
       <p14:sectionLst xmlns:p14="http://schemas.microsoft.com/office/powerpoint/2010/main">
-        <p14:section name="Opening" id="{6e33b392-0c0e-854e-589d-1980c693cde3}">
+        <p14:section name="Opening" id="{19e5e22e-ee71-5448-6563-d393fc25f479}">
           <p14:sldIdLst>
             <p14:sldId id="256"/>
           </p14:sldIdLst>
         </p14:section>
-        <p14:section name="Gate" id="{963194db-5c99-8a23-2585-14f6a0305c3d}">
+        <p14:section name="Gate" id="{85b78cd2-7e96-52c0-aa56-3bf8ec583f85}">
           <p14:sldIdLst>
             <p14:sldId id="257"/>
             <p14:sldId id="258"/>
           </p14:sldIdLst>
         </p14:section>
-        <p14:section name="Pre-teach" id="{6628ad64-2473-8596-d0e0-73014a8c9c0c}">
+        <p14:section name="Pre-teach" id="{c8e7ac31-b950-6ba6-cca2-b41bcb7f873f}">
           <p14:sldIdLst>
             <p14:sldId id="259"/>
             <p14:sldId id="260"/>
           </p14:sldIdLst>
         </p14:section>
-        <p14:section name="Read-along" id="{439f8847-7d32-f014-6f83-b6e1122d964b}">
+        <p14:section name="Read-along" id="{21a3931d-99a6-56b3-b59b-580952e8c87b}">
           <p14:sldIdLst>
             <p14:sldId id="261"/>
             <p14:sldId id="262"/>
           </p14:sldIdLst>
         </p14:section>
-        <p14:section name="Teach" id="{3497ef7c-dd9a-0109-30c9-878a655023a7}">
+        <p14:section name="Teach" id="{4ae9eaee-7b5f-450d-20f2-82d927fdf731}">
           <p14:sldIdLst>
             <p14:sldId id="263"/>
             <p14:sldId id="264"/>
             <p14:sldId id="265"/>
           </p14:sldIdLst>
         </p14:section>
-        <p14:section name="Routes" id="{6c7f9399-2849-e1f2-0627-4ed504cb3d45}">
+        <p14:section name="Routes" id="{f1b3eef2-064f-8b2a-a3fd-0c46db2b112e}">
           <p14:sldIdLst>
             <p14:sldId id="266"/>
             <p14:sldId id="267"/>
             <p14:sldId id="268"/>
           </p14:sldIdLst>
         </p14:section>
-        <p14:section name="Close" id="{f252de43-570d-1eb2-2210-f2d4bd5d5cab}">
+        <p14:section name="Close" id="{94143642-3e94-68cf-02ce-6645020a771d}">
           <p14:sldIdLst>
             <p14:sldId id="269"/>
           </p14:sldIdLst>
         </p14:section>
-        <p14:section name="Answers" id="{9f513d5a-4f63-977d-999c-35a0b6b021a1}">
+        <p14:section name="Answers" id="{126d25ee-e9fc-2587-4394-d875096a5f02}">
           <p14:sldIdLst>
             <p14:sldId id="270"/>
             <p14:sldId id="271"/>
@@ -1044,7 +1044,7 @@
               <a:rPr lang="en-US" dirty="0"/>
               <a:t>Exit ticket — individual, silent, on a slip or mini-whiteboard. Recall before help: no notes, no lanes, no hints. Collect before pupils leave.
 Question: Which machine always gives the same output as: add 4, then multiply by 2?
-Answer: B   Multiply by 2, then add 8. Add 4 then multiply by 2 gives 2(x + 4). Multiplying each term by 2 gives 2x + 8, which is multiply by 2 then add 8.
+Answer: A   Multiply by 2, then add 8. Add 4 then multiply by 2 gives 2(x + 4). Multiplying each term by 2 gives 2x + 8, which is multiply by 2 then add 8.
 Source of this question: module 3 task ("Same machine or not?") from the manifest.
 Sort the slips: correct → ready to move on; incorrect → start next lesson in the pre-teach group, with the read-along and the Support lane. Same destination next time.</a:t>
             </a:r>
@@ -1317,7 +1317,7 @@
             <a:r>
               <a:rPr lang="en-US" dirty="0"/>
               <a:t>Answers — exit ticket: Exit ticket. Reveal the answer; pupils mark their own work in a different colour, then read the "why" together. Same destination for every lane, so one answer serves the whole class.
-Answer: B   Multiply by 2, then add 8
+Answer: A   Multiply by 2, then add 8
 Why: Add 4 then multiply by 2 gives 2(x + 4). Multiplying each term by 2 gives 2x + 8, which is multiply by 2 then add 8.
 Ask a Support pupil to explain one step, and a Stretch pupil to share their extension.</a:t>
             </a:r>
@@ -1408,8 +1408,8 @@
             <a:r>
               <a:rPr lang="en-US" dirty="0"/>
               <a:t>Do now — retrieval. Silent, no notes, no help: recall comes before any support. Give about four minutes.
-1. Which pair of functions turns m into 4m + 9?  →  B   Multiply by 4, then add 9
-2. Which expression means: add 3, then divide by 8?  →  B   (x + 3)/8
+1. Which pair of functions turns m into 4m + 9?  →  C   Multiply by 4, then add 9
+2. Which expression means: add 3, then divide by 8?  →  C   (x + 3)/8
 3. Work out 6 × (4 + 5).  →  54
 Circulate: who gets 3/3 (Stretch route), 2/3 (Core), 0–1 (Support)? Use this to route pupils later in the lesson.</a:t>
             </a:r>
@@ -1500,8 +1500,8 @@
             <a:r>
               <a:rPr lang="en-US" dirty="0"/>
               <a:t>Answers — pupils mark their own in a different colour, then hands up for 3/3, 2/3, 1/3.
-1. B   Multiply by 4, then add 9. 4m shows that m was multiplied by 4. The + 9 shows that 9 was added afterwards.
-2. B   (x + 3)/8. Add 3 to get x + 3. Divide the whole of it by 8: (x + 3)/8.
+1. C   Multiply by 4, then add 9. 4m shows that m was multiplied by 4. The + 9 shows that 9 was added afterwards.
+2. C   (x + 3)/8. Add 3 to get x + 3. Divide the whole of it by 8: (x + 3)/8.
 3. 54. Brackets first: 4 + 5 = 9. Then 6 × 9 = 54.
 Say the route each score points to: 3/3 Stretch, 2/3 Core, 0–1 Support. Pupils may choose to move up.</a:t>
             </a:r>
@@ -7445,7 +7445,7 @@
                 <a:ea typeface="Calibri" pitchFamily="34" charset="-122"/>
                 <a:cs typeface="Calibri" pitchFamily="34" charset="-120"/>
               </a:rPr>
-              <a:t>Add 3      </a:t>
+              <a:t>Multiply by 3      </a:t>
             </a:r>
             <a:pPr algn="ctr" indent="0" marL="0">
               <a:buNone/>
@@ -7501,7 +7501,7 @@
                 <a:ea typeface="Calibri" pitchFamily="34" charset="-122"/>
                 <a:cs typeface="Calibri" pitchFamily="34" charset="-120"/>
               </a:rPr>
-              <a:t>Multiply by 3</a:t>
+              <a:t>Add 3</a:t>
             </a:r>
             <a:endParaRPr lang="en-US" sz="2000" dirty="0"/>
           </a:p>
@@ -8528,7 +8528,7 @@
                 <a:ea typeface="Calibri" pitchFamily="34" charset="-122"/>
                 <a:cs typeface="Calibri" pitchFamily="34" charset="-120"/>
               </a:rPr>
-              <a:t>Multiply by 2, then add 4</a:t>
+              <a:t>Multiply by 2, then add 8</a:t>
             </a:r>
             <a:endParaRPr lang="en-US" sz="2400" dirty="0"/>
           </a:p>
@@ -8565,7 +8565,7 @@
                 <a:ea typeface="Calibri" pitchFamily="34" charset="-122"/>
                 <a:cs typeface="Calibri" pitchFamily="34" charset="-120"/>
               </a:rPr>
-              <a:t>Multiply by 2, then add 8</a:t>
+              <a:t>Add 2, then multiply by 4</a:t>
             </a:r>
             <a:endParaRPr lang="en-US" sz="2400" dirty="0"/>
           </a:p>
@@ -8602,7 +8602,7 @@
                 <a:ea typeface="Calibri" pitchFamily="34" charset="-122"/>
                 <a:cs typeface="Calibri" pitchFamily="34" charset="-120"/>
               </a:rPr>
-              <a:t>Add 8, then multiply by 2</a:t>
+              <a:t>Multiply by 2, then add 4</a:t>
             </a:r>
             <a:endParaRPr lang="en-US" sz="2400" dirty="0"/>
           </a:p>
@@ -8639,7 +8639,7 @@
                 <a:ea typeface="Calibri" pitchFamily="34" charset="-122"/>
                 <a:cs typeface="Calibri" pitchFamily="34" charset="-120"/>
               </a:rPr>
-              <a:t>Add 2, then multiply by 4</a:t>
+              <a:t>Add 8, then multiply by 2</a:t>
             </a:r>
             <a:endParaRPr lang="en-US" sz="2400" dirty="0"/>
           </a:p>
@@ -10073,7 +10073,7 @@
                 <a:ea typeface="Cambria" pitchFamily="34" charset="-122"/>
                 <a:cs typeface="Cambria" pitchFamily="34" charset="-120"/>
               </a:rPr>
-              <a:t>B   Multiply by 2, then add 8</a:t>
+              <a:t>A   Multiply by 2, then add 8</a:t>
             </a:r>
             <a:endParaRPr lang="en-US" sz="1800" dirty="0"/>
           </a:p>
@@ -10607,7 +10607,7 @@
                 <a:ea typeface="Calibri" pitchFamily="34" charset="-122"/>
                 <a:cs typeface="Calibri" pitchFamily="34" charset="-120"/>
               </a:rPr>
-              <a:t>Add 9, then multiply by 4</a:t>
+              <a:t>Add 4, then multiply by 9</a:t>
             </a:r>
             <a:endParaRPr lang="en-US" sz="2000" dirty="0"/>
           </a:p>
@@ -10644,7 +10644,7 @@
                 <a:ea typeface="Calibri" pitchFamily="34" charset="-122"/>
                 <a:cs typeface="Calibri" pitchFamily="34" charset="-120"/>
               </a:rPr>
-              <a:t>Multiply by 4, then add 9</a:t>
+              <a:t>Multiply by 9, then add 4</a:t>
             </a:r>
             <a:endParaRPr lang="en-US" sz="2000" dirty="0"/>
           </a:p>
@@ -10681,7 +10681,7 @@
                 <a:ea typeface="Calibri" pitchFamily="34" charset="-122"/>
                 <a:cs typeface="Calibri" pitchFamily="34" charset="-120"/>
               </a:rPr>
-              <a:t>Multiply by 9, then add 4</a:t>
+              <a:t>Multiply by 4, then add 9</a:t>
             </a:r>
             <a:endParaRPr lang="en-US" sz="2000" dirty="0"/>
           </a:p>
@@ -10718,7 +10718,7 @@
                 <a:ea typeface="Calibri" pitchFamily="34" charset="-122"/>
                 <a:cs typeface="Calibri" pitchFamily="34" charset="-120"/>
               </a:rPr>
-              <a:t>Add 4, then multiply by 9</a:t>
+              <a:t>Add 9, then multiply by 4</a:t>
             </a:r>
             <a:endParaRPr lang="en-US" sz="2000" dirty="0"/>
           </a:p>
@@ -10959,7 +10959,7 @@
                 <a:ea typeface="Calibri" pitchFamily="34" charset="-122"/>
                 <a:cs typeface="Calibri" pitchFamily="34" charset="-120"/>
               </a:rPr>
-              <a:t>(x + 3)/8</a:t>
+              <a:t>x + 3/8</a:t>
             </a:r>
             <a:endParaRPr lang="en-US" sz="2400" dirty="0"/>
           </a:p>
@@ -10996,7 +10996,7 @@
                 <a:ea typeface="Calibri" pitchFamily="34" charset="-122"/>
                 <a:cs typeface="Calibri" pitchFamily="34" charset="-120"/>
               </a:rPr>
-              <a:t>8(x + 3)</a:t>
+              <a:t>(x + 3)/8</a:t>
             </a:r>
             <a:endParaRPr lang="en-US" sz="2400" dirty="0"/>
           </a:p>
@@ -11033,7 +11033,7 @@
                 <a:ea typeface="Calibri" pitchFamily="34" charset="-122"/>
                 <a:cs typeface="Calibri" pitchFamily="34" charset="-120"/>
               </a:rPr>
-              <a:t>x + 3/8</a:t>
+              <a:t>8(x + 3)</a:t>
             </a:r>
             <a:endParaRPr lang="en-US" sz="2400" dirty="0"/>
           </a:p>
@@ -11632,7 +11632,7 @@
                 <a:ea typeface="Calibri" pitchFamily="34" charset="-122"/>
                 <a:cs typeface="Calibri" pitchFamily="34" charset="-120"/>
               </a:rPr>
-              <a:t>B   Multiply by 4, then add 9</a:t>
+              <a:t>C   Multiply by 4, then add 9</a:t>
             </a:r>
             <a:endParaRPr lang="en-US" sz="2200" dirty="0"/>
           </a:p>
@@ -11882,7 +11882,7 @@
                 <a:ea typeface="Calibri" pitchFamily="34" charset="-122"/>
                 <a:cs typeface="Calibri" pitchFamily="34" charset="-120"/>
               </a:rPr>
-              <a:t>B   (x + 3)/8</a:t>
+              <a:t>C   (x + 3)/8</a:t>
             </a:r>
             <a:endParaRPr lang="en-US" sz="2200" dirty="0"/>
           </a:p>

--- a/decks/maths-algebra/maths-algebra_ch5_find-two-step.pptx
+++ b/decks/maths-algebra/maths-algebra_ch5_find-two-step.pptx
@@ -123,49 +123,49 @@
   <p:extLst>
     <p:ext uri="{521415D9-36F7-43E2-AB2F-B90AF26B5E84}">
       <p14:sectionLst xmlns:p14="http://schemas.microsoft.com/office/powerpoint/2010/main">
-        <p14:section name="Opening" id="{19e5e22e-ee71-5448-6563-d393fc25f479}">
+        <p14:section name="Opening" id="{9b86477a-9c00-fb80-91a5-c9c432ef6eab}">
           <p14:sldIdLst>
             <p14:sldId id="256"/>
           </p14:sldIdLst>
         </p14:section>
-        <p14:section name="Gate" id="{85b78cd2-7e96-52c0-aa56-3bf8ec583f85}">
+        <p14:section name="Gate" id="{3e05229f-d679-1e8c-e73a-2a889d537916}">
           <p14:sldIdLst>
             <p14:sldId id="257"/>
             <p14:sldId id="258"/>
           </p14:sldIdLst>
         </p14:section>
-        <p14:section name="Pre-teach" id="{c8e7ac31-b950-6ba6-cca2-b41bcb7f873f}">
+        <p14:section name="Pre-teach" id="{be6ffd97-1e2a-1579-dcf4-fc8a02f223f8}">
           <p14:sldIdLst>
             <p14:sldId id="259"/>
             <p14:sldId id="260"/>
           </p14:sldIdLst>
         </p14:section>
-        <p14:section name="Read-along" id="{21a3931d-99a6-56b3-b59b-580952e8c87b}">
+        <p14:section name="Read-along" id="{4cf1854d-13e3-6180-e5e7-035fe9d4a009}">
           <p14:sldIdLst>
             <p14:sldId id="261"/>
             <p14:sldId id="262"/>
           </p14:sldIdLst>
         </p14:section>
-        <p14:section name="Teach" id="{4ae9eaee-7b5f-450d-20f2-82d927fdf731}">
+        <p14:section name="Teach" id="{9b167b9b-5066-92bf-1d98-473682014fbc}">
           <p14:sldIdLst>
             <p14:sldId id="263"/>
             <p14:sldId id="264"/>
             <p14:sldId id="265"/>
           </p14:sldIdLst>
         </p14:section>
-        <p14:section name="Routes" id="{f1b3eef2-064f-8b2a-a3fd-0c46db2b112e}">
+        <p14:section name="Routes" id="{4319a289-0508-96bf-a6ce-83f1acd41a95}">
           <p14:sldIdLst>
             <p14:sldId id="266"/>
             <p14:sldId id="267"/>
             <p14:sldId id="268"/>
           </p14:sldIdLst>
         </p14:section>
-        <p14:section name="Close" id="{94143642-3e94-68cf-02ce-6645020a771d}">
+        <p14:section name="Close" id="{d3cd647e-2401-7a14-90a1-80e47456f3a6}">
           <p14:sldIdLst>
             <p14:sldId id="269"/>
           </p14:sldIdLst>
         </p14:section>
-        <p14:section name="Answers" id="{126d25ee-e9fc-2587-4394-d875096a5f02}">
+        <p14:section name="Answers" id="{7eb3ffa9-36fc-045a-18aa-0724d0220c03}">
           <p14:sldIdLst>
             <p14:sldId id="270"/>
             <p14:sldId id="271"/>
